--- a/sources/03_safety_update.pptx
+++ b/sources/03_safety_update.pptx
@@ -3164,7 +3164,7 @@
                 </a:solidFill>
                 <a:latin typeface="Arial"/>
               </a:rPr>
-              <a:t>Project AURORA | A17-03 | Version 0.9</a:t>
+              <a:t>Demo programme | A17-03 | Version 0.9</a:t>
             </a:r>
           </a:p>
         </p:txBody>
